--- a/22_September_Tuesday/04_morning_sources_detectors/Sources_Monitors/McStas_McXtrace_Sources_and_Monitors.pptx
+++ b/22_September_Tuesday/04_morning_sources_detectors/Sources_Monitors/McStas_McXtrace_Sources_and_Monitors.pptx
@@ -5,7 +5,7 @@
     <p:sldMasterId id="2147483648" r:id="rId1"/>
   </p:sldMasterIdLst>
   <p:notesMasterIdLst>
-    <p:notesMasterId r:id="rId20"/>
+    <p:notesMasterId r:id="rId21"/>
   </p:notesMasterIdLst>
   <p:sldIdLst>
     <p:sldId id="256" r:id="rId2"/>
@@ -24,8 +24,9 @@
     <p:sldId id="269" r:id="rId15"/>
     <p:sldId id="270" r:id="rId16"/>
     <p:sldId id="273" r:id="rId17"/>
-    <p:sldId id="271" r:id="rId18"/>
-    <p:sldId id="272" r:id="rId19"/>
+    <p:sldId id="274" r:id="rId18"/>
+    <p:sldId id="271" r:id="rId19"/>
+    <p:sldId id="272" r:id="rId20"/>
   </p:sldIdLst>
   <p:sldSz cx="12192000" cy="6858000"/>
   <p:notesSz cx="6858000" cy="12192000"/>
@@ -1015,7 +1016,7 @@
           <a:p>
             <a:fld id="{F7021451-1387-4CA6-816F-3879F97B5CBC}" type="slidenum">
               <a:rPr lang="en-US"/>
-              <a:t>17</a:t>
+              <a:t>18</a:t>
             </a:fld>
             <a:endParaRPr lang="en-US"/>
           </a:p>
@@ -1099,7 +1100,7 @@
           <a:p>
             <a:fld id="{F7021451-1387-4CA6-816F-3879F97B5CBC}" type="slidenum">
               <a:rPr lang="en-US"/>
-              <a:t>18</a:t>
+              <a:t>19</a:t>
             </a:fld>
             <a:endParaRPr lang="en-US"/>
           </a:p>
@@ -6434,7 +6435,7 @@
             </a:ln>
             <a:extLst>
               <a:ext uri="{C572A759-6A51-4108-AA02-DFA0A04FC94B}">
-                <ma14:wrappingTextBoxFlag xmlns="" xmlns:m="http://schemas.openxmlformats.org/officeDocument/2006/math" xmlns:a14="http://schemas.microsoft.com/office/drawing/2010/main" xmlns:ma14="http://schemas.microsoft.com/office/mac/drawingml/2011/main" val="1"/>
+                <ma14:wrappingTextBoxFlag xmlns:ma14="http://schemas.microsoft.com/office/mac/drawingml/2011/main" xmlns:a14="http://schemas.microsoft.com/office/drawing/2010/main" xmlns:m="http://schemas.openxmlformats.org/officeDocument/2006/math" xmlns="" val="1"/>
               </a:ext>
             </a:extLst>
           </p:spPr>
@@ -6825,7 +6826,7 @@
             </a:ln>
             <a:extLst>
               <a:ext uri="{C572A759-6A51-4108-AA02-DFA0A04FC94B}">
-                <ma14:wrappingTextBoxFlag xmlns="" xmlns:m="http://schemas.openxmlformats.org/officeDocument/2006/math" xmlns:a14="http://schemas.microsoft.com/office/drawing/2010/main" xmlns:ma14="http://schemas.microsoft.com/office/mac/drawingml/2011/main" val="1"/>
+                <ma14:wrappingTextBoxFlag xmlns:ma14="http://schemas.microsoft.com/office/mac/drawingml/2011/main" xmlns:a14="http://schemas.microsoft.com/office/drawing/2010/main" xmlns:m="http://schemas.openxmlformats.org/officeDocument/2006/math" xmlns="" val="1"/>
               </a:ext>
             </a:extLst>
           </p:spPr>
@@ -6874,7 +6875,7 @@
             </a:ln>
             <a:extLst>
               <a:ext uri="{C572A759-6A51-4108-AA02-DFA0A04FC94B}">
-                <ma14:wrappingTextBoxFlag xmlns="" xmlns:m="http://schemas.openxmlformats.org/officeDocument/2006/math" xmlns:a14="http://schemas.microsoft.com/office/drawing/2010/main" xmlns:ma14="http://schemas.microsoft.com/office/mac/drawingml/2011/main" val="1"/>
+                <ma14:wrappingTextBoxFlag xmlns:ma14="http://schemas.microsoft.com/office/mac/drawingml/2011/main" xmlns:a14="http://schemas.microsoft.com/office/drawing/2010/main" xmlns:m="http://schemas.openxmlformats.org/officeDocument/2006/math" xmlns="" val="1"/>
               </a:ext>
             </a:extLst>
           </p:spPr>
@@ -7000,7 +7001,7 @@
             </a:ln>
             <a:extLst>
               <a:ext uri="{C572A759-6A51-4108-AA02-DFA0A04FC94B}">
-                <ma14:wrappingTextBoxFlag xmlns="" xmlns:m="http://schemas.openxmlformats.org/officeDocument/2006/math" xmlns:a14="http://schemas.microsoft.com/office/drawing/2010/main" xmlns:ma14="http://schemas.microsoft.com/office/mac/drawingml/2011/main" val="1"/>
+                <ma14:wrappingTextBoxFlag xmlns:ma14="http://schemas.microsoft.com/office/mac/drawingml/2011/main" xmlns:a14="http://schemas.microsoft.com/office/drawing/2010/main" xmlns:m="http://schemas.openxmlformats.org/officeDocument/2006/math" xmlns="" val="1"/>
               </a:ext>
             </a:extLst>
           </p:spPr>
@@ -7100,7 +7101,7 @@
             </a:ln>
             <a:extLst>
               <a:ext uri="{C572A759-6A51-4108-AA02-DFA0A04FC94B}">
-                <ma14:wrappingTextBoxFlag xmlns="" xmlns:m="http://schemas.openxmlformats.org/officeDocument/2006/math" xmlns:a14="http://schemas.microsoft.com/office/drawing/2010/main" xmlns:ma14="http://schemas.microsoft.com/office/mac/drawingml/2011/main" val="1"/>
+                <ma14:wrappingTextBoxFlag xmlns:ma14="http://schemas.microsoft.com/office/mac/drawingml/2011/main" xmlns:a14="http://schemas.microsoft.com/office/drawing/2010/main" xmlns:m="http://schemas.openxmlformats.org/officeDocument/2006/math" xmlns="" val="1"/>
               </a:ext>
             </a:extLst>
           </p:spPr>
@@ -7149,7 +7150,7 @@
             </a:ln>
             <a:extLst>
               <a:ext uri="{C572A759-6A51-4108-AA02-DFA0A04FC94B}">
-                <ma14:wrappingTextBoxFlag xmlns="" xmlns:m="http://schemas.openxmlformats.org/officeDocument/2006/math" xmlns:a14="http://schemas.microsoft.com/office/drawing/2010/main" xmlns:ma14="http://schemas.microsoft.com/office/mac/drawingml/2011/main" val="1"/>
+                <ma14:wrappingTextBoxFlag xmlns:ma14="http://schemas.microsoft.com/office/mac/drawingml/2011/main" xmlns:a14="http://schemas.microsoft.com/office/drawing/2010/main" xmlns:m="http://schemas.openxmlformats.org/officeDocument/2006/math" xmlns="" val="1"/>
               </a:ext>
             </a:extLst>
           </p:spPr>
@@ -7198,7 +7199,7 @@
             </a:ln>
             <a:extLst>
               <a:ext uri="{C572A759-6A51-4108-AA02-DFA0A04FC94B}">
-                <ma14:wrappingTextBoxFlag xmlns="" xmlns:m="http://schemas.openxmlformats.org/officeDocument/2006/math" xmlns:a14="http://schemas.microsoft.com/office/drawing/2010/main" xmlns:ma14="http://schemas.microsoft.com/office/mac/drawingml/2011/main" val="1"/>
+                <ma14:wrappingTextBoxFlag xmlns:ma14="http://schemas.microsoft.com/office/mac/drawingml/2011/main" xmlns:a14="http://schemas.microsoft.com/office/drawing/2010/main" xmlns:m="http://schemas.openxmlformats.org/officeDocument/2006/math" xmlns="" val="1"/>
               </a:ext>
             </a:extLst>
           </p:spPr>
@@ -7247,7 +7248,7 @@
             </a:ln>
             <a:extLst>
               <a:ext uri="{C572A759-6A51-4108-AA02-DFA0A04FC94B}">
-                <ma14:wrappingTextBoxFlag xmlns="" xmlns:m="http://schemas.openxmlformats.org/officeDocument/2006/math" xmlns:a14="http://schemas.microsoft.com/office/drawing/2010/main" xmlns:ma14="http://schemas.microsoft.com/office/mac/drawingml/2011/main" val="1"/>
+                <ma14:wrappingTextBoxFlag xmlns:ma14="http://schemas.microsoft.com/office/mac/drawingml/2011/main" xmlns:a14="http://schemas.microsoft.com/office/drawing/2010/main" xmlns:m="http://schemas.openxmlformats.org/officeDocument/2006/math" xmlns="" val="1"/>
               </a:ext>
             </a:extLst>
           </p:spPr>
@@ -7296,7 +7297,7 @@
             </a:ln>
             <a:extLst>
               <a:ext uri="{C572A759-6A51-4108-AA02-DFA0A04FC94B}">
-                <ma14:wrappingTextBoxFlag xmlns="" xmlns:m="http://schemas.openxmlformats.org/officeDocument/2006/math" xmlns:a14="http://schemas.microsoft.com/office/drawing/2010/main" xmlns:ma14="http://schemas.microsoft.com/office/mac/drawingml/2011/main" val="1"/>
+                <ma14:wrappingTextBoxFlag xmlns:ma14="http://schemas.microsoft.com/office/mac/drawingml/2011/main" xmlns:a14="http://schemas.microsoft.com/office/drawing/2010/main" xmlns:m="http://schemas.openxmlformats.org/officeDocument/2006/math" xmlns="" val="1"/>
               </a:ext>
             </a:extLst>
           </p:spPr>
@@ -8188,7 +8189,7 @@
             </a:ln>
             <a:extLst>
               <a:ext uri="{C572A759-6A51-4108-AA02-DFA0A04FC94B}">
-                <ma14:wrappingTextBoxFlag xmlns="" xmlns:m="http://schemas.openxmlformats.org/officeDocument/2006/math" xmlns:a14="http://schemas.microsoft.com/office/drawing/2010/main" xmlns:ma14="http://schemas.microsoft.com/office/mac/drawingml/2011/main" val="1"/>
+                <ma14:wrappingTextBoxFlag xmlns:ma14="http://schemas.microsoft.com/office/mac/drawingml/2011/main" xmlns:a14="http://schemas.microsoft.com/office/drawing/2010/main" xmlns:m="http://schemas.openxmlformats.org/officeDocument/2006/math" xmlns="" val="1"/>
               </a:ext>
             </a:extLst>
           </p:spPr>
@@ -8245,7 +8246,7 @@
             </a:ln>
             <a:extLst>
               <a:ext uri="{C572A759-6A51-4108-AA02-DFA0A04FC94B}">
-                <ma14:wrappingTextBoxFlag xmlns="" xmlns:m="http://schemas.openxmlformats.org/officeDocument/2006/math" xmlns:a14="http://schemas.microsoft.com/office/drawing/2010/main" xmlns:ma14="http://schemas.microsoft.com/office/mac/drawingml/2011/main" val="1"/>
+                <ma14:wrappingTextBoxFlag xmlns:ma14="http://schemas.microsoft.com/office/mac/drawingml/2011/main" xmlns:a14="http://schemas.microsoft.com/office/drawing/2010/main" xmlns:m="http://schemas.openxmlformats.org/officeDocument/2006/math" xmlns="" val="1"/>
               </a:ext>
             </a:extLst>
           </p:spPr>
@@ -8751,6 +8752,66 @@
 
 <file path=ppt/slides/slide17.xml><?xml version="1.0" encoding="utf-8"?>
 <p:sld xmlns:a="http://schemas.openxmlformats.org/drawingml/2006/main" xmlns:r="http://schemas.openxmlformats.org/officeDocument/2006/relationships" xmlns:p="http://schemas.openxmlformats.org/presentationml/2006/main">
+  <p:cSld>
+    <p:spTree>
+      <p:nvGrpSpPr>
+        <p:cNvPr id="1" name=""/>
+        <p:cNvGrpSpPr/>
+        <p:nvPr/>
+      </p:nvGrpSpPr>
+      <p:grpSpPr>
+        <a:xfrm>
+          <a:off x="0" y="0"/>
+          <a:ext cx="0" cy="0"/>
+          <a:chOff x="0" y="0"/>
+          <a:chExt cx="0" cy="0"/>
+        </a:xfrm>
+      </p:grpSpPr>
+      <p:pic>
+        <p:nvPicPr>
+          <p:cNvPr id="2" name="Picture 1">
+            <a:extLst>
+              <a:ext uri="{FF2B5EF4-FFF2-40B4-BE49-F238E27FC236}">
+                <a16:creationId xmlns:a16="http://schemas.microsoft.com/office/drawing/2014/main" id="{B94D6D6D-E5F1-49FF-635C-2F32ED80FD87}"/>
+              </a:ext>
+            </a:extLst>
+          </p:cNvPr>
+          <p:cNvPicPr>
+            <a:picLocks noChangeAspect="1"/>
+          </p:cNvPicPr>
+          <p:nvPr/>
+        </p:nvPicPr>
+        <p:blipFill>
+          <a:blip r:embed="rId2"/>
+          <a:stretch>
+            <a:fillRect/>
+          </a:stretch>
+        </p:blipFill>
+        <p:spPr>
+          <a:xfrm>
+            <a:off x="155532" y="215702"/>
+            <a:ext cx="7772400" cy="6426595"/>
+          </a:xfrm>
+          <a:prstGeom prst="rect">
+            <a:avLst/>
+          </a:prstGeom>
+        </p:spPr>
+      </p:pic>
+    </p:spTree>
+    <p:extLst>
+      <p:ext uri="{BB962C8B-B14F-4D97-AF65-F5344CB8AC3E}">
+        <p14:creationId xmlns:p14="http://schemas.microsoft.com/office/powerpoint/2010/main" val="2011153015"/>
+      </p:ext>
+    </p:extLst>
+  </p:cSld>
+  <p:clrMapOvr>
+    <a:masterClrMapping/>
+  </p:clrMapOvr>
+</p:sld>
+</file>
+
+<file path=ppt/slides/slide18.xml><?xml version="1.0" encoding="utf-8"?>
+<p:sld xmlns:a="http://schemas.openxmlformats.org/drawingml/2006/main" xmlns:r="http://schemas.openxmlformats.org/officeDocument/2006/relationships" xmlns:p="http://schemas.openxmlformats.org/presentationml/2006/main">
   <p:cSld name="Slide 16">
     <p:bg>
       <p:bgPr>
@@ -9394,7 +9455,7 @@
 </p:sld>
 </file>
 
-<file path=ppt/slides/slide18.xml><?xml version="1.0" encoding="utf-8"?>
+<file path=ppt/slides/slide19.xml><?xml version="1.0" encoding="utf-8"?>
 <p:sld xmlns:a="http://schemas.openxmlformats.org/drawingml/2006/main" xmlns:r="http://schemas.openxmlformats.org/officeDocument/2006/relationships" xmlns:p="http://schemas.openxmlformats.org/presentationml/2006/main">
   <p:cSld name="Slide 17">
     <p:bg>
@@ -17432,7 +17493,7 @@
             </a:ln>
             <a:extLst>
               <a:ext uri="{C572A759-6A51-4108-AA02-DFA0A04FC94B}">
-                <ma14:wrappingTextBoxFlag xmlns:ma14="http://schemas.microsoft.com/office/mac/drawingml/2011/main" xmlns:a14="http://schemas.microsoft.com/office/drawing/2010/main" xmlns:m="http://schemas.openxmlformats.org/officeDocument/2006/math" xmlns="" val="1"/>
+                <ma14:wrappingTextBoxFlag xmlns="" xmlns:m="http://schemas.openxmlformats.org/officeDocument/2006/math" xmlns:a14="http://schemas.microsoft.com/office/drawing/2010/main" xmlns:ma14="http://schemas.microsoft.com/office/mac/drawingml/2011/main" val="1"/>
               </a:ext>
             </a:extLst>
           </p:spPr>

--- a/22_September_Tuesday/04_morning_sources_detectors/Sources_Monitors/McStas_McXtrace_Sources_and_Monitors.pptx
+++ b/22_September_Tuesday/04_morning_sources_detectors/Sources_Monitors/McStas_McXtrace_Sources_and_Monitors.pptx
@@ -8789,8 +8789,180 @@
         </p:blipFill>
         <p:spPr>
           <a:xfrm>
-            <a:off x="155532" y="215702"/>
-            <a:ext cx="7772400" cy="6426595"/>
+            <a:off x="0" y="937546"/>
+            <a:ext cx="5389750" cy="4456505"/>
+          </a:xfrm>
+          <a:prstGeom prst="rect">
+            <a:avLst/>
+          </a:prstGeom>
+        </p:spPr>
+      </p:pic>
+      <p:pic>
+        <p:nvPicPr>
+          <p:cNvPr id="3" name="Picture 2">
+            <a:extLst>
+              <a:ext uri="{FF2B5EF4-FFF2-40B4-BE49-F238E27FC236}">
+                <a16:creationId xmlns:a16="http://schemas.microsoft.com/office/drawing/2014/main" id="{7E62DC19-F805-60B5-4771-C154DD682C62}"/>
+              </a:ext>
+            </a:extLst>
+          </p:cNvPr>
+          <p:cNvPicPr>
+            <a:picLocks noChangeAspect="1"/>
+          </p:cNvPicPr>
+          <p:nvPr/>
+        </p:nvPicPr>
+        <p:blipFill>
+          <a:blip r:embed="rId3"/>
+          <a:stretch>
+            <a:fillRect/>
+          </a:stretch>
+        </p:blipFill>
+        <p:spPr>
+          <a:xfrm>
+            <a:off x="5221266" y="813524"/>
+            <a:ext cx="6970734" cy="4704547"/>
+          </a:xfrm>
+          <a:prstGeom prst="rect">
+            <a:avLst/>
+          </a:prstGeom>
+        </p:spPr>
+      </p:pic>
+      <p:sp>
+        <p:nvSpPr>
+          <p:cNvPr id="5" name="Text 1">
+            <a:extLst>
+              <a:ext uri="{FF2B5EF4-FFF2-40B4-BE49-F238E27FC236}">
+                <a16:creationId xmlns:a16="http://schemas.microsoft.com/office/drawing/2014/main" id="{3955DFF4-64AC-5E43-1BC1-00EFF31594D2}"/>
+              </a:ext>
+            </a:extLst>
+          </p:cNvPr>
+          <p:cNvSpPr/>
+          <p:nvPr/>
+        </p:nvSpPr>
+        <p:spPr>
+          <a:xfrm>
+            <a:off x="322450" y="5508974"/>
+            <a:ext cx="1747650" cy="822960"/>
+          </a:xfrm>
+          <a:prstGeom prst="rect">
+            <a:avLst/>
+          </a:prstGeom>
+          <a:noFill/>
+          <a:ln/>
+        </p:spPr>
+        <p:txBody>
+          <a:bodyPr wrap="square" rtlCol="0" anchor="ctr"/>
+          <a:lstStyle/>
+          <a:p>
+            <a:pPr marL="0" indent="0" algn="l">
+              <a:buNone/>
+            </a:pPr>
+            <a:r>
+              <a:rPr lang="en-US" sz="3000" b="1" dirty="0" err="1">
+                <a:solidFill>
+                  <a:srgbClr val="20242B"/>
+                </a:solidFill>
+                <a:latin typeface="Cambria" pitchFamily="34" charset="0"/>
+                <a:ea typeface="Cambria" pitchFamily="34" charset="-122"/>
+                <a:cs typeface="Cambria" pitchFamily="34" charset="-120"/>
+              </a:rPr>
+              <a:t>NeXpy</a:t>
+            </a:r>
+            <a:endParaRPr lang="en-US" sz="3000" dirty="0"/>
+          </a:p>
+        </p:txBody>
+      </p:sp>
+      <p:sp>
+        <p:nvSpPr>
+          <p:cNvPr id="6" name="Text 1">
+            <a:extLst>
+              <a:ext uri="{FF2B5EF4-FFF2-40B4-BE49-F238E27FC236}">
+                <a16:creationId xmlns:a16="http://schemas.microsoft.com/office/drawing/2014/main" id="{E1ADA28D-A9A8-728C-8CCC-8CAB04CE7FE7}"/>
+              </a:ext>
+            </a:extLst>
+          </p:cNvPr>
+          <p:cNvSpPr/>
+          <p:nvPr/>
+        </p:nvSpPr>
+        <p:spPr>
+          <a:xfrm>
+            <a:off x="616202" y="114586"/>
+            <a:ext cx="9601200" cy="822960"/>
+          </a:xfrm>
+          <a:prstGeom prst="rect">
+            <a:avLst/>
+          </a:prstGeom>
+          <a:noFill/>
+          <a:ln/>
+        </p:spPr>
+        <p:txBody>
+          <a:bodyPr wrap="square" rtlCol="0" anchor="ctr"/>
+          <a:lstStyle/>
+          <a:p>
+            <a:pPr marL="0" indent="0" algn="l">
+              <a:buNone/>
+            </a:pPr>
+            <a:r>
+              <a:rPr lang="en-US" sz="3000" b="1" dirty="0">
+                <a:solidFill>
+                  <a:srgbClr val="20242B"/>
+                </a:solidFill>
+                <a:latin typeface="Cambria" pitchFamily="34" charset="0"/>
+                <a:ea typeface="Cambria" pitchFamily="34" charset="-122"/>
+                <a:cs typeface="Cambria" pitchFamily="34" charset="-120"/>
+              </a:rPr>
+              <a:t>Lightweight HDF5/</a:t>
+            </a:r>
+            <a:r>
+              <a:rPr lang="en-US" sz="3000" b="1" dirty="0" err="1">
+                <a:solidFill>
+                  <a:srgbClr val="20242B"/>
+                </a:solidFill>
+                <a:latin typeface="Cambria" pitchFamily="34" charset="0"/>
+                <a:ea typeface="Cambria" pitchFamily="34" charset="-122"/>
+                <a:cs typeface="Cambria" pitchFamily="34" charset="-120"/>
+              </a:rPr>
+              <a:t>NeXus</a:t>
+            </a:r>
+            <a:r>
+              <a:rPr lang="en-US" sz="3000" b="1" dirty="0">
+                <a:solidFill>
+                  <a:srgbClr val="20242B"/>
+                </a:solidFill>
+                <a:latin typeface="Cambria" pitchFamily="34" charset="0"/>
+                <a:ea typeface="Cambria" pitchFamily="34" charset="-122"/>
+                <a:cs typeface="Cambria" pitchFamily="34" charset="-120"/>
+              </a:rPr>
+              <a:t> plotting, fits etc.</a:t>
+            </a:r>
+            <a:endParaRPr lang="en-US" sz="3000" dirty="0"/>
+          </a:p>
+        </p:txBody>
+      </p:sp>
+      <p:pic>
+        <p:nvPicPr>
+          <p:cNvPr id="7" name="Picture 6" descr="silx logo">
+            <a:extLst>
+              <a:ext uri="{FF2B5EF4-FFF2-40B4-BE49-F238E27FC236}">
+                <a16:creationId xmlns:a16="http://schemas.microsoft.com/office/drawing/2014/main" id="{D22D1C5D-FC98-68FF-A3F7-886BA21085E5}"/>
+              </a:ext>
+            </a:extLst>
+          </p:cNvPr>
+          <p:cNvPicPr>
+            <a:picLocks noChangeAspect="1"/>
+          </p:cNvPicPr>
+          <p:nvPr/>
+        </p:nvPicPr>
+        <p:blipFill>
+          <a:blip r:embed="rId4"/>
+          <a:stretch>
+            <a:fillRect/>
+          </a:stretch>
+        </p:blipFill>
+        <p:spPr>
+          <a:xfrm>
+            <a:off x="10141202" y="5296995"/>
+            <a:ext cx="939627" cy="1238599"/>
           </a:xfrm>
           <a:prstGeom prst="rect">
             <a:avLst/>
